--- a/presentation/Beyond_Official_Statistics_2min.pptx
+++ b/presentation/Beyond_Official_Statistics_2min.pptx
@@ -108,6 +108,11 @@
       </a:defRPr>
     </a:lvl9pPr>
   </p:defaultTextStyle>
+  <p:extLst>
+    <p:ext uri="{EFAFB233-063F-42B5-8137-9DF3F51BA10A}">
+      <p15:sldGuideLst xmlns:p15="http://schemas.microsoft.com/office/powerpoint/2012/main"/>
+    </p:ext>
+  </p:extLst>
 </p:presentation>
 </file>
 
@@ -712,7 +717,48 @@
         </p:nvSpPr>
         <p:spPr>
           <a:xfrm>
-            <a:off x="685800" y="5532120"/>
+            <a:off x="7139421" y="6547104"/>
+            <a:ext cx="5052579" cy="320040"/>
+          </a:xfrm>
+          <a:prstGeom prst="rect">
+            <a:avLst/>
+          </a:prstGeom>
+          <a:noFill/>
+          <a:ln>
+            <a:noFill/>
+          </a:ln>
+        </p:spPr>
+        <p:txBody>
+          <a:bodyPr wrap="square" anchor="t"/>
+          <a:lstStyle/>
+          <a:p>
+            <a:r>
+              <a:rPr lang="en-US" sz="1300" b="0" dirty="0">
+                <a:solidFill>
+                  <a:srgbClr val="DCE8F5"/>
+                </a:solidFill>
+                <a:latin typeface="Aptos"/>
+              </a:rPr>
+              <a:t>Columbia SIPA - DSPC7100 Applying Machine Learning - Spring 2026</a:t>
+            </a:r>
+          </a:p>
+        </p:txBody>
+      </p:sp>
+      <p:sp>
+        <p:nvSpPr>
+          <p:cNvPr id="6" name="Text 50">
+            <a:extLst>
+              <a:ext uri="{FF2B5EF4-FFF2-40B4-BE49-F238E27FC236}">
+                <a16:creationId xmlns:a16="http://schemas.microsoft.com/office/drawing/2014/main" id="{0F393162-C09F-51C3-2B16-C9132AD03CE1}"/>
+              </a:ext>
+            </a:extLst>
+          </p:cNvPr>
+          <p:cNvSpPr txBox="1"/>
+          <p:nvPr/>
+        </p:nvSpPr>
+        <p:spPr>
+          <a:xfrm>
+            <a:off x="685800" y="4942332"/>
             <a:ext cx="7772400" cy="320040"/>
           </a:xfrm>
           <a:prstGeom prst="rect">
@@ -728,13 +774,31 @@
           <a:lstStyle/>
           <a:p>
             <a:r>
-              <a:rPr lang="en-US" sz="1300" b="0">
+              <a:rPr lang="en-US" sz="1400" b="1" dirty="0">
                 <a:solidFill>
                   <a:srgbClr val="DCE8F5"/>
                 </a:solidFill>
                 <a:latin typeface="Aptos"/>
               </a:rPr>
-              <a:t>Columbia SIPA - DSPC7100 Applying Machine Learning - Spring 2026</a:t>
+              <a:t>Team: Jinen Wang, Levi Liu, Wuhao Xia, </a:t>
+            </a:r>
+            <a:r>
+              <a:rPr lang="en-US" sz="1400" b="1" dirty="0" err="1">
+                <a:solidFill>
+                  <a:srgbClr val="DCE8F5"/>
+                </a:solidFill>
+                <a:latin typeface="Aptos"/>
+              </a:rPr>
+              <a:t>Chenyi</a:t>
+            </a:r>
+            <a:r>
+              <a:rPr lang="en-US" sz="1400" b="1" dirty="0">
+                <a:solidFill>
+                  <a:srgbClr val="DCE8F5"/>
+                </a:solidFill>
+                <a:latin typeface="Aptos"/>
+              </a:rPr>
+              <a:t> Jiang</a:t>
             </a:r>
           </a:p>
         </p:txBody>
